--- a/set/2026-10-25 ECBC-CH.pptx
+++ b/set/2026-10-25 ECBC-CH.pptx
@@ -305,7 +305,7 @@
           <a:p>
             <a:fld id="{E759A0DE-F190-5444-87AC-4719D5F20D15}" type="datetimeFigureOut">
               <a:rPr lang="en-US" smtClean="0"/>
-              <a:t>10/21/26</a:t>
+              <a:t>10/24/26</a:t>
             </a:fld>
             <a:endParaRPr lang="en-US"/>
           </a:p>
@@ -503,7 +503,7 @@
           <a:p>
             <a:fld id="{E759A0DE-F190-5444-87AC-4719D5F20D15}" type="datetimeFigureOut">
               <a:rPr lang="en-US" smtClean="0"/>
-              <a:t>10/21/26</a:t>
+              <a:t>10/24/26</a:t>
             </a:fld>
             <a:endParaRPr lang="en-US"/>
           </a:p>
@@ -711,7 +711,7 @@
           <a:p>
             <a:fld id="{E759A0DE-F190-5444-87AC-4719D5F20D15}" type="datetimeFigureOut">
               <a:rPr lang="en-US" smtClean="0"/>
-              <a:t>10/21/26</a:t>
+              <a:t>10/24/26</a:t>
             </a:fld>
             <a:endParaRPr lang="en-US"/>
           </a:p>
@@ -909,7 +909,7 @@
           <a:p>
             <a:fld id="{E759A0DE-F190-5444-87AC-4719D5F20D15}" type="datetimeFigureOut">
               <a:rPr lang="en-US" smtClean="0"/>
-              <a:t>10/21/26</a:t>
+              <a:t>10/24/26</a:t>
             </a:fld>
             <a:endParaRPr lang="en-US"/>
           </a:p>
@@ -1184,7 +1184,7 @@
           <a:p>
             <a:fld id="{E759A0DE-F190-5444-87AC-4719D5F20D15}" type="datetimeFigureOut">
               <a:rPr lang="en-US" smtClean="0"/>
-              <a:t>10/21/26</a:t>
+              <a:t>10/24/26</a:t>
             </a:fld>
             <a:endParaRPr lang="en-US"/>
           </a:p>
@@ -1449,7 +1449,7 @@
           <a:p>
             <a:fld id="{E759A0DE-F190-5444-87AC-4719D5F20D15}" type="datetimeFigureOut">
               <a:rPr lang="en-US" smtClean="0"/>
-              <a:t>10/21/26</a:t>
+              <a:t>10/24/26</a:t>
             </a:fld>
             <a:endParaRPr lang="en-US"/>
           </a:p>
@@ -1861,7 +1861,7 @@
           <a:p>
             <a:fld id="{E759A0DE-F190-5444-87AC-4719D5F20D15}" type="datetimeFigureOut">
               <a:rPr lang="en-US" smtClean="0"/>
-              <a:t>10/21/26</a:t>
+              <a:t>10/24/26</a:t>
             </a:fld>
             <a:endParaRPr lang="en-US"/>
           </a:p>
@@ -2002,7 +2002,7 @@
           <a:p>
             <a:fld id="{E759A0DE-F190-5444-87AC-4719D5F20D15}" type="datetimeFigureOut">
               <a:rPr lang="en-US" smtClean="0"/>
-              <a:t>10/21/26</a:t>
+              <a:t>10/24/26</a:t>
             </a:fld>
             <a:endParaRPr lang="en-US"/>
           </a:p>
@@ -2115,7 +2115,7 @@
           <a:p>
             <a:fld id="{E759A0DE-F190-5444-87AC-4719D5F20D15}" type="datetimeFigureOut">
               <a:rPr lang="en-US" smtClean="0"/>
-              <a:t>10/21/26</a:t>
+              <a:t>10/24/26</a:t>
             </a:fld>
             <a:endParaRPr lang="en-US"/>
           </a:p>
@@ -2426,7 +2426,7 @@
           <a:p>
             <a:fld id="{E759A0DE-F190-5444-87AC-4719D5F20D15}" type="datetimeFigureOut">
               <a:rPr lang="en-US" smtClean="0"/>
-              <a:t>10/21/26</a:t>
+              <a:t>10/24/26</a:t>
             </a:fld>
             <a:endParaRPr lang="en-US"/>
           </a:p>
@@ -2714,7 +2714,7 @@
           <a:p>
             <a:fld id="{E759A0DE-F190-5444-87AC-4719D5F20D15}" type="datetimeFigureOut">
               <a:rPr lang="en-US" smtClean="0"/>
-              <a:t>10/21/26</a:t>
+              <a:t>10/24/26</a:t>
             </a:fld>
             <a:endParaRPr lang="en-US"/>
           </a:p>
@@ -2955,7 +2955,7 @@
           <a:p>
             <a:fld id="{E759A0DE-F190-5444-87AC-4719D5F20D15}" type="datetimeFigureOut">
               <a:rPr lang="en-US" smtClean="0"/>
-              <a:t>10/21/26</a:t>
+              <a:t>10/24/26</a:t>
             </a:fld>
             <a:endParaRPr lang="en-US"/>
           </a:p>
@@ -7811,7 +7811,27 @@
                 <a:latin typeface="Avenir Medium" panose="02000503020000020003" pitchFamily="2" charset="0"/>
                 <a:ea typeface="Bodoni Ornaments" pitchFamily="2" charset="0"/>
               </a:rPr>
-              <a:t>His oath His covenant His blood</a:t>
+              <a:t>His oath His </a:t>
+            </a:r>
+            <a:r>
+              <a:rPr lang="en-US" sz="3600">
+                <a:solidFill>
+                  <a:schemeClr val="bg1"/>
+                </a:solidFill>
+                <a:latin typeface="Avenir Medium" panose="02000503020000020003" pitchFamily="2" charset="0"/>
+                <a:ea typeface="Bodoni Ornaments" pitchFamily="2" charset="0"/>
+              </a:rPr>
+              <a:t>covenant and His </a:t>
+            </a:r>
+            <a:r>
+              <a:rPr lang="en-US" sz="3600" dirty="0">
+                <a:solidFill>
+                  <a:schemeClr val="bg1"/>
+                </a:solidFill>
+                <a:latin typeface="Avenir Medium" panose="02000503020000020003" pitchFamily="2" charset="0"/>
+                <a:ea typeface="Bodoni Ornaments" pitchFamily="2" charset="0"/>
+              </a:rPr>
+              <a:t>blood</a:t>
             </a:r>
           </a:p>
           <a:p>
